--- a/ゲーム科1年/01_後期/ゲームプログラミングⅢ/05_オリジナルゲーム制作.pptx
+++ b/ゲーム科1年/01_後期/ゲームプログラミングⅢ/05_オリジナルゲーム制作.pptx
@@ -10,6 +10,7 @@
     <p:sldId id="258" r:id="rId4"/>
     <p:sldId id="259" r:id="rId5"/>
     <p:sldId id="260" r:id="rId6"/>
+    <p:sldId id="261" r:id="rId7"/>
   </p:sldIdLst>
   <p:sldSz cx="12192000" cy="6858000"/>
   <p:notesSz cx="6858000" cy="9144000"/>
@@ -263,7 +264,7 @@
           <a:p>
             <a:fld id="{E9CC885B-4903-4D54-9A93-00025F12DED9}" type="datetimeFigureOut">
               <a:rPr kumimoji="1" lang="ja-JP" altLang="en-US" smtClean="0"/>
-              <a:t>2026/5/13</a:t>
+              <a:t>2026/10/5</a:t>
             </a:fld>
             <a:endParaRPr kumimoji="1" lang="ja-JP" altLang="en-US"/>
           </a:p>
@@ -493,7 +494,7 @@
           <a:p>
             <a:fld id="{E9CC885B-4903-4D54-9A93-00025F12DED9}" type="datetimeFigureOut">
               <a:rPr kumimoji="1" lang="ja-JP" altLang="en-US" smtClean="0"/>
-              <a:t>2026/5/13</a:t>
+              <a:t>2026/10/5</a:t>
             </a:fld>
             <a:endParaRPr kumimoji="1" lang="ja-JP" altLang="en-US"/>
           </a:p>
@@ -733,7 +734,7 @@
           <a:p>
             <a:fld id="{E9CC885B-4903-4D54-9A93-00025F12DED9}" type="datetimeFigureOut">
               <a:rPr kumimoji="1" lang="ja-JP" altLang="en-US" smtClean="0"/>
-              <a:t>2026/5/13</a:t>
+              <a:t>2026/10/5</a:t>
             </a:fld>
             <a:endParaRPr kumimoji="1" lang="ja-JP" altLang="en-US"/>
           </a:p>
@@ -963,7 +964,7 @@
           <a:p>
             <a:fld id="{E9CC885B-4903-4D54-9A93-00025F12DED9}" type="datetimeFigureOut">
               <a:rPr kumimoji="1" lang="ja-JP" altLang="en-US" smtClean="0"/>
-              <a:t>2026/5/13</a:t>
+              <a:t>2026/10/5</a:t>
             </a:fld>
             <a:endParaRPr kumimoji="1" lang="ja-JP" altLang="en-US"/>
           </a:p>
@@ -1238,7 +1239,7 @@
           <a:p>
             <a:fld id="{E9CC885B-4903-4D54-9A93-00025F12DED9}" type="datetimeFigureOut">
               <a:rPr kumimoji="1" lang="ja-JP" altLang="en-US" smtClean="0"/>
-              <a:t>2026/5/13</a:t>
+              <a:t>2026/10/5</a:t>
             </a:fld>
             <a:endParaRPr kumimoji="1" lang="ja-JP" altLang="en-US"/>
           </a:p>
@@ -1567,7 +1568,7 @@
           <a:p>
             <a:fld id="{E9CC885B-4903-4D54-9A93-00025F12DED9}" type="datetimeFigureOut">
               <a:rPr kumimoji="1" lang="ja-JP" altLang="en-US" smtClean="0"/>
-              <a:t>2026/5/13</a:t>
+              <a:t>2026/10/5</a:t>
             </a:fld>
             <a:endParaRPr kumimoji="1" lang="ja-JP" altLang="en-US"/>
           </a:p>
@@ -2043,7 +2044,7 @@
           <a:p>
             <a:fld id="{E9CC885B-4903-4D54-9A93-00025F12DED9}" type="datetimeFigureOut">
               <a:rPr kumimoji="1" lang="ja-JP" altLang="en-US" smtClean="0"/>
-              <a:t>2026/5/13</a:t>
+              <a:t>2026/10/5</a:t>
             </a:fld>
             <a:endParaRPr kumimoji="1" lang="ja-JP" altLang="en-US"/>
           </a:p>
@@ -2184,7 +2185,7 @@
           <a:p>
             <a:fld id="{E9CC885B-4903-4D54-9A93-00025F12DED9}" type="datetimeFigureOut">
               <a:rPr kumimoji="1" lang="ja-JP" altLang="en-US" smtClean="0"/>
-              <a:t>2026/5/13</a:t>
+              <a:t>2026/10/5</a:t>
             </a:fld>
             <a:endParaRPr kumimoji="1" lang="ja-JP" altLang="en-US"/>
           </a:p>
@@ -2297,7 +2298,7 @@
           <a:p>
             <a:fld id="{E9CC885B-4903-4D54-9A93-00025F12DED9}" type="datetimeFigureOut">
               <a:rPr kumimoji="1" lang="ja-JP" altLang="en-US" smtClean="0"/>
-              <a:t>2026/5/13</a:t>
+              <a:t>2026/10/5</a:t>
             </a:fld>
             <a:endParaRPr kumimoji="1" lang="ja-JP" altLang="en-US"/>
           </a:p>
@@ -2640,7 +2641,7 @@
           <a:p>
             <a:fld id="{E9CC885B-4903-4D54-9A93-00025F12DED9}" type="datetimeFigureOut">
               <a:rPr kumimoji="1" lang="ja-JP" altLang="en-US" smtClean="0"/>
-              <a:t>2026/5/13</a:t>
+              <a:t>2026/10/5</a:t>
             </a:fld>
             <a:endParaRPr kumimoji="1" lang="ja-JP" altLang="en-US"/>
           </a:p>
@@ -2928,7 +2929,7 @@
           <a:p>
             <a:fld id="{E9CC885B-4903-4D54-9A93-00025F12DED9}" type="datetimeFigureOut">
               <a:rPr kumimoji="1" lang="ja-JP" altLang="en-US" smtClean="0"/>
-              <a:t>2026/5/13</a:t>
+              <a:t>2026/10/5</a:t>
             </a:fld>
             <a:endParaRPr kumimoji="1" lang="ja-JP" altLang="en-US"/>
           </a:p>
@@ -3201,7 +3202,7 @@
           <a:p>
             <a:fld id="{E9CC885B-4903-4D54-9A93-00025F12DED9}" type="datetimeFigureOut">
               <a:rPr kumimoji="1" lang="ja-JP" altLang="en-US" smtClean="0"/>
-              <a:t>2026/5/13</a:t>
+              <a:t>2026/10/5</a:t>
             </a:fld>
             <a:endParaRPr kumimoji="1" lang="ja-JP" altLang="en-US"/>
           </a:p>
@@ -5034,6 +5035,145 @@
 </p:sld>
 </file>
 
+<file path=ppt/slides/slide6.xml><?xml version="1.0" encoding="utf-8"?>
+<p:sld xmlns:a="http://schemas.openxmlformats.org/drawingml/2006/main" xmlns:r="http://schemas.openxmlformats.org/officeDocument/2006/relationships" xmlns:p="http://schemas.openxmlformats.org/presentationml/2006/main">
+  <p:cSld>
+    <p:spTree>
+      <p:nvGrpSpPr>
+        <p:cNvPr id="1" name=""/>
+        <p:cNvGrpSpPr/>
+        <p:nvPr/>
+      </p:nvGrpSpPr>
+      <p:grpSpPr>
+        <a:xfrm>
+          <a:off x="0" y="0"/>
+          <a:ext cx="0" cy="0"/>
+          <a:chOff x="0" y="0"/>
+          <a:chExt cx="0" cy="0"/>
+        </a:xfrm>
+      </p:grpSpPr>
+      <p:sp>
+        <p:nvSpPr>
+          <p:cNvPr id="4" name="テキスト ボックス 3">
+            <a:extLst>
+              <a:ext uri="{FF2B5EF4-FFF2-40B4-BE49-F238E27FC236}">
+                <a16:creationId xmlns:a16="http://schemas.microsoft.com/office/drawing/2014/main" id="{5A13BF46-B8C5-48AA-8308-C9ECFF431A18}"/>
+              </a:ext>
+            </a:extLst>
+          </p:cNvPr>
+          <p:cNvSpPr txBox="1"/>
+          <p:nvPr/>
+        </p:nvSpPr>
+        <p:spPr>
+          <a:xfrm>
+            <a:off x="567542" y="491954"/>
+            <a:ext cx="6046848" cy="584775"/>
+          </a:xfrm>
+          <a:prstGeom prst="rect">
+            <a:avLst/>
+          </a:prstGeom>
+          <a:noFill/>
+        </p:spPr>
+        <p:txBody>
+          <a:bodyPr wrap="none" rtlCol="0">
+            <a:spAutoFit/>
+          </a:bodyPr>
+          <a:lstStyle/>
+          <a:p>
+            <a:r>
+              <a:rPr kumimoji="1" lang="ja-JP" altLang="en-US" sz="3200" b="1" u="sng" dirty="0"/>
+              <a:t>オリジナルゲーム制作 さいごに</a:t>
+            </a:r>
+          </a:p>
+        </p:txBody>
+      </p:sp>
+      <p:sp>
+        <p:nvSpPr>
+          <p:cNvPr id="6" name="テキスト ボックス 5">
+            <a:extLst>
+              <a:ext uri="{FF2B5EF4-FFF2-40B4-BE49-F238E27FC236}">
+                <a16:creationId xmlns:a16="http://schemas.microsoft.com/office/drawing/2014/main" id="{55830AD6-028B-4C4E-80BF-B70DFC1C3A46}"/>
+              </a:ext>
+            </a:extLst>
+          </p:cNvPr>
+          <p:cNvSpPr txBox="1"/>
+          <p:nvPr/>
+        </p:nvSpPr>
+        <p:spPr>
+          <a:xfrm>
+            <a:off x="567542" y="1216429"/>
+            <a:ext cx="10033516" cy="1200329"/>
+          </a:xfrm>
+          <a:prstGeom prst="rect">
+            <a:avLst/>
+          </a:prstGeom>
+          <a:noFill/>
+        </p:spPr>
+        <p:txBody>
+          <a:bodyPr wrap="none" rtlCol="0">
+            <a:spAutoFit/>
+          </a:bodyPr>
+          <a:lstStyle/>
+          <a:p>
+            <a:r>
+              <a:rPr kumimoji="1" lang="ja-JP" altLang="en-US" sz="2400" dirty="0"/>
+              <a:t>ゲーム制作の時間はどれだけあっても足りません。</a:t>
+            </a:r>
+            <a:endParaRPr kumimoji="1" lang="en-US" altLang="ja-JP" sz="2400" dirty="0"/>
+          </a:p>
+          <a:p>
+            <a:r>
+              <a:rPr lang="ja-JP" altLang="en-US" sz="2400" b="1" dirty="0">
+                <a:solidFill>
+                  <a:srgbClr val="FF0000"/>
+                </a:solidFill>
+              </a:rPr>
+              <a:t>可能な限り学校に残って作業しましょう。</a:t>
+            </a:r>
+            <a:endParaRPr lang="en-US" altLang="ja-JP" sz="2400" b="1" dirty="0">
+              <a:solidFill>
+                <a:srgbClr val="FF0000"/>
+              </a:solidFill>
+            </a:endParaRPr>
+          </a:p>
+          <a:p>
+            <a:r>
+              <a:rPr kumimoji="1" lang="ja-JP" altLang="en-US" sz="2400" dirty="0"/>
+              <a:t>また、これを機に</a:t>
+            </a:r>
+            <a:r>
+              <a:rPr kumimoji="1" lang="ja-JP" altLang="en-US" sz="2400" b="1" dirty="0">
+                <a:solidFill>
+                  <a:srgbClr val="FF0000"/>
+                </a:solidFill>
+              </a:rPr>
+              <a:t>お家で作業する環境</a:t>
+            </a:r>
+            <a:r>
+              <a:rPr kumimoji="1" lang="ja-JP" altLang="en-US" sz="2400" dirty="0"/>
+              <a:t>を整えても良いかも</a:t>
+            </a:r>
+            <a:r>
+              <a:rPr kumimoji="1" lang="ja-JP" altLang="en-US" sz="2400"/>
+              <a:t>しれません。</a:t>
+            </a:r>
+            <a:endParaRPr kumimoji="1" lang="en-US" altLang="ja-JP" sz="2400"/>
+          </a:p>
+        </p:txBody>
+      </p:sp>
+    </p:spTree>
+    <p:extLst>
+      <p:ext uri="{BB962C8B-B14F-4D97-AF65-F5344CB8AC3E}">
+        <p14:creationId xmlns:p14="http://schemas.microsoft.com/office/powerpoint/2010/main" val="152866240"/>
+      </p:ext>
+    </p:extLst>
+  </p:cSld>
+  <p:clrMapOvr>
+    <a:masterClrMapping/>
+  </p:clrMapOvr>
+</p:sld>
+</file>
+
 <file path=ppt/theme/theme1.xml><?xml version="1.0" encoding="utf-8"?>
 <a:theme xmlns:a="http://schemas.openxmlformats.org/drawingml/2006/main" name="Office テーマ">
   <a:themeElements>

--- a/ゲーム科1年/01_後期/ゲームプログラミングⅢ/05_オリジナルゲーム制作.pptx
+++ b/ゲーム科1年/01_後期/ゲームプログラミングⅢ/05_オリジナルゲーム制作.pptx
@@ -5102,7 +5102,7 @@
         <p:spPr>
           <a:xfrm>
             <a:off x="567542" y="1216429"/>
-            <a:ext cx="10033516" cy="1200329"/>
+            <a:ext cx="10956846" cy="2308324"/>
           </a:xfrm>
           <a:prstGeom prst="rect">
             <a:avLst/>
@@ -5139,7 +5139,14 @@
           <a:p>
             <a:r>
               <a:rPr kumimoji="1" lang="ja-JP" altLang="en-US" sz="2400" dirty="0"/>
-              <a:t>また、これを機に</a:t>
+              <a:t>また、学校が空いていない期間に作業できないのは非常にもったいないです。</a:t>
+            </a:r>
+            <a:endParaRPr kumimoji="1" lang="en-US" altLang="ja-JP" sz="2400" dirty="0"/>
+          </a:p>
+          <a:p>
+            <a:r>
+              <a:rPr kumimoji="1" lang="ja-JP" altLang="en-US" sz="2400" dirty="0"/>
+              <a:t>これを機に</a:t>
             </a:r>
             <a:r>
               <a:rPr kumimoji="1" lang="ja-JP" altLang="en-US" sz="2400" b="1" dirty="0">
@@ -5151,13 +5158,51 @@
             </a:r>
             <a:r>
               <a:rPr kumimoji="1" lang="ja-JP" altLang="en-US" sz="2400" dirty="0"/>
-              <a:t>を整えても良いかも</a:t>
-            </a:r>
-            <a:r>
-              <a:rPr kumimoji="1" lang="ja-JP" altLang="en-US" sz="2400"/>
-              <a:t>しれません。</a:t>
-            </a:r>
-            <a:endParaRPr kumimoji="1" lang="en-US" altLang="ja-JP" sz="2400"/>
+              <a:t>を整えても良いかもしれません。</a:t>
+            </a:r>
+            <a:endParaRPr kumimoji="1" lang="en-US" altLang="ja-JP" sz="2400" dirty="0"/>
+          </a:p>
+          <a:p>
+            <a:endParaRPr lang="en-US" altLang="ja-JP" sz="2400" dirty="0"/>
+          </a:p>
+          <a:p>
+            <a:r>
+              <a:rPr lang="ja-JP" altLang="en-US" sz="2400" dirty="0">
+                <a:hlinkClick r:id="rId2"/>
+              </a:rPr>
+              <a:t>パソコン（</a:t>
+            </a:r>
+            <a:r>
+              <a:rPr lang="en-US" altLang="ja-JP" sz="2400" dirty="0">
+                <a:hlinkClick r:id="rId2"/>
+              </a:rPr>
+              <a:t>PC</a:t>
+            </a:r>
+            <a:r>
+              <a:rPr lang="ja-JP" altLang="en-US" sz="2400" dirty="0">
+                <a:hlinkClick r:id="rId2"/>
+              </a:rPr>
+              <a:t>）通販のドスパラ</a:t>
+            </a:r>
+            <a:r>
+              <a:rPr lang="en-US" altLang="ja-JP" sz="2400" dirty="0">
+                <a:hlinkClick r:id="rId2"/>
+              </a:rPr>
+              <a:t>【</a:t>
+            </a:r>
+            <a:r>
+              <a:rPr lang="ja-JP" altLang="en-US" sz="2400" dirty="0">
+                <a:hlinkClick r:id="rId2"/>
+              </a:rPr>
+              <a:t>公式</a:t>
+            </a:r>
+            <a:r>
+              <a:rPr lang="en-US" altLang="ja-JP" sz="2400" dirty="0">
+                <a:hlinkClick r:id="rId2"/>
+              </a:rPr>
+              <a:t>】</a:t>
+            </a:r>
+            <a:endParaRPr kumimoji="1" lang="en-US" altLang="ja-JP" sz="2400" dirty="0"/>
           </a:p>
         </p:txBody>
       </p:sp>

--- a/ゲーム科1年/01_後期/ゲームプログラミングⅢ/05_オリジナルゲーム制作.pptx
+++ b/ゲーム科1年/01_後期/ゲームプログラミングⅢ/05_オリジナルゲーム制作.pptx
@@ -264,7 +264,7 @@
           <a:p>
             <a:fld id="{E9CC885B-4903-4D54-9A93-00025F12DED9}" type="datetimeFigureOut">
               <a:rPr kumimoji="1" lang="ja-JP" altLang="en-US" smtClean="0"/>
-              <a:t>2026/10/5</a:t>
+              <a:t>2026/10/15</a:t>
             </a:fld>
             <a:endParaRPr kumimoji="1" lang="ja-JP" altLang="en-US"/>
           </a:p>
@@ -494,7 +494,7 @@
           <a:p>
             <a:fld id="{E9CC885B-4903-4D54-9A93-00025F12DED9}" type="datetimeFigureOut">
               <a:rPr kumimoji="1" lang="ja-JP" altLang="en-US" smtClean="0"/>
-              <a:t>2026/10/5</a:t>
+              <a:t>2026/10/15</a:t>
             </a:fld>
             <a:endParaRPr kumimoji="1" lang="ja-JP" altLang="en-US"/>
           </a:p>
@@ -734,7 +734,7 @@
           <a:p>
             <a:fld id="{E9CC885B-4903-4D54-9A93-00025F12DED9}" type="datetimeFigureOut">
               <a:rPr kumimoji="1" lang="ja-JP" altLang="en-US" smtClean="0"/>
-              <a:t>2026/10/5</a:t>
+              <a:t>2026/10/15</a:t>
             </a:fld>
             <a:endParaRPr kumimoji="1" lang="ja-JP" altLang="en-US"/>
           </a:p>
@@ -964,7 +964,7 @@
           <a:p>
             <a:fld id="{E9CC885B-4903-4D54-9A93-00025F12DED9}" type="datetimeFigureOut">
               <a:rPr kumimoji="1" lang="ja-JP" altLang="en-US" smtClean="0"/>
-              <a:t>2026/10/5</a:t>
+              <a:t>2026/10/15</a:t>
             </a:fld>
             <a:endParaRPr kumimoji="1" lang="ja-JP" altLang="en-US"/>
           </a:p>
@@ -1239,7 +1239,7 @@
           <a:p>
             <a:fld id="{E9CC885B-4903-4D54-9A93-00025F12DED9}" type="datetimeFigureOut">
               <a:rPr kumimoji="1" lang="ja-JP" altLang="en-US" smtClean="0"/>
-              <a:t>2026/10/5</a:t>
+              <a:t>2026/10/15</a:t>
             </a:fld>
             <a:endParaRPr kumimoji="1" lang="ja-JP" altLang="en-US"/>
           </a:p>
@@ -1568,7 +1568,7 @@
           <a:p>
             <a:fld id="{E9CC885B-4903-4D54-9A93-00025F12DED9}" type="datetimeFigureOut">
               <a:rPr kumimoji="1" lang="ja-JP" altLang="en-US" smtClean="0"/>
-              <a:t>2026/10/5</a:t>
+              <a:t>2026/10/15</a:t>
             </a:fld>
             <a:endParaRPr kumimoji="1" lang="ja-JP" altLang="en-US"/>
           </a:p>
@@ -2044,7 +2044,7 @@
           <a:p>
             <a:fld id="{E9CC885B-4903-4D54-9A93-00025F12DED9}" type="datetimeFigureOut">
               <a:rPr kumimoji="1" lang="ja-JP" altLang="en-US" smtClean="0"/>
-              <a:t>2026/10/5</a:t>
+              <a:t>2026/10/15</a:t>
             </a:fld>
             <a:endParaRPr kumimoji="1" lang="ja-JP" altLang="en-US"/>
           </a:p>
@@ -2185,7 +2185,7 @@
           <a:p>
             <a:fld id="{E9CC885B-4903-4D54-9A93-00025F12DED9}" type="datetimeFigureOut">
               <a:rPr kumimoji="1" lang="ja-JP" altLang="en-US" smtClean="0"/>
-              <a:t>2026/10/5</a:t>
+              <a:t>2026/10/15</a:t>
             </a:fld>
             <a:endParaRPr kumimoji="1" lang="ja-JP" altLang="en-US"/>
           </a:p>
@@ -2298,7 +2298,7 @@
           <a:p>
             <a:fld id="{E9CC885B-4903-4D54-9A93-00025F12DED9}" type="datetimeFigureOut">
               <a:rPr kumimoji="1" lang="ja-JP" altLang="en-US" smtClean="0"/>
-              <a:t>2026/10/5</a:t>
+              <a:t>2026/10/15</a:t>
             </a:fld>
             <a:endParaRPr kumimoji="1" lang="ja-JP" altLang="en-US"/>
           </a:p>
@@ -2641,7 +2641,7 @@
           <a:p>
             <a:fld id="{E9CC885B-4903-4D54-9A93-00025F12DED9}" type="datetimeFigureOut">
               <a:rPr kumimoji="1" lang="ja-JP" altLang="en-US" smtClean="0"/>
-              <a:t>2026/10/5</a:t>
+              <a:t>2026/10/15</a:t>
             </a:fld>
             <a:endParaRPr kumimoji="1" lang="ja-JP" altLang="en-US"/>
           </a:p>
@@ -2929,7 +2929,7 @@
           <a:p>
             <a:fld id="{E9CC885B-4903-4D54-9A93-00025F12DED9}" type="datetimeFigureOut">
               <a:rPr kumimoji="1" lang="ja-JP" altLang="en-US" smtClean="0"/>
-              <a:t>2026/10/5</a:t>
+              <a:t>2026/10/15</a:t>
             </a:fld>
             <a:endParaRPr kumimoji="1" lang="ja-JP" altLang="en-US"/>
           </a:p>
@@ -3202,7 +3202,7 @@
           <a:p>
             <a:fld id="{E9CC885B-4903-4D54-9A93-00025F12DED9}" type="datetimeFigureOut">
               <a:rPr kumimoji="1" lang="ja-JP" altLang="en-US" smtClean="0"/>
-              <a:t>2026/10/5</a:t>
+              <a:t>2026/10/15</a:t>
             </a:fld>
             <a:endParaRPr kumimoji="1" lang="ja-JP" altLang="en-US"/>
           </a:p>
@@ -4314,7 +4314,7 @@
         <p:spPr>
           <a:xfrm>
             <a:off x="567542" y="1216429"/>
-            <a:ext cx="9725739" cy="4154984"/>
+            <a:ext cx="10033516" cy="4893647"/>
           </a:xfrm>
           <a:prstGeom prst="rect">
             <a:avLst/>
@@ -4418,6 +4418,24 @@
               <a:t>判断がつきにくいと思いますので、こまめに先生に相談しましょう。</a:t>
             </a:r>
             <a:endParaRPr kumimoji="1" lang="en-US" altLang="ja-JP" sz="2400" dirty="0"/>
+          </a:p>
+          <a:p>
+            <a:endParaRPr lang="en-US" altLang="ja-JP" sz="2400" dirty="0"/>
+          </a:p>
+          <a:p>
+            <a:r>
+              <a:rPr kumimoji="1" lang="ja-JP" altLang="en-US" sz="2400" b="1" dirty="0">
+                <a:solidFill>
+                  <a:srgbClr val="FF0000"/>
+                </a:solidFill>
+              </a:rPr>
+              <a:t>スケジュールは一人ずつ先生と話し合いながら一緒に考えます。</a:t>
+            </a:r>
+            <a:endParaRPr kumimoji="1" lang="en-US" altLang="ja-JP" sz="2400" b="1" dirty="0">
+              <a:solidFill>
+                <a:srgbClr val="FF0000"/>
+              </a:solidFill>
+            </a:endParaRPr>
           </a:p>
         </p:txBody>
       </p:sp>
@@ -4866,10 +4884,7 @@
           <a:lstStyle/>
           <a:p>
             <a:pPr algn="ctr"/>
-            <a:r>
-              <a:rPr kumimoji="1" lang="ja-JP" altLang="en-US" b="1" dirty="0"/>
-              <a:t>チェック合格</a:t>
-            </a:r>
+            <a:endParaRPr kumimoji="1" lang="ja-JP" altLang="en-US" b="1" dirty="0"/>
           </a:p>
         </p:txBody>
       </p:sp>
